--- a/index/designs/y8-l15/l5-how-long/l5-how-long.pptx
+++ b/index/designs/y8-l15/l5-how-long/l5-how-long.pptx
@@ -4160,8 +4160,8 @@
         </p:nvSpPr>
         <p:spPr>
           <a:xfrm>
-            <a:off x="507950" y="180975"/>
-            <a:ext cx="1264837" cy="171450"/>
+            <a:off x="507950" y="176213"/>
+            <a:ext cx="1371404" cy="180975"/>
           </a:xfrm>
           <a:prstGeom prst="rect">
             <a:avLst/>
@@ -4199,8 +4199,8 @@
         </p:nvSpPr>
         <p:spPr>
           <a:xfrm>
-            <a:off x="2033439" y="166688"/>
-            <a:ext cx="1288215" cy="200025"/>
+            <a:off x="2137916" y="166688"/>
+            <a:ext cx="1379753" cy="200025"/>
           </a:xfrm>
           <a:prstGeom prst="rect">
             <a:avLst/>
@@ -4238,8 +4238,8 @@
         </p:nvSpPr>
         <p:spPr>
           <a:xfrm>
-            <a:off x="11244709" y="180975"/>
-            <a:ext cx="448127" cy="171450"/>
+            <a:off x="11239500" y="176213"/>
+            <a:ext cx="453441" cy="180975"/>
           </a:xfrm>
           <a:prstGeom prst="rect">
             <a:avLst/>
@@ -4307,7 +4307,7 @@
         </p:nvSpPr>
         <p:spPr>
           <a:xfrm>
-            <a:off x="609600" y="2343299"/>
+            <a:off x="609600" y="2357586"/>
             <a:ext cx="11192256" cy="200025"/>
           </a:xfrm>
           <a:prstGeom prst="rect">
@@ -4346,12 +4346,12 @@
         </p:nvSpPr>
         <p:spPr>
           <a:xfrm>
-            <a:off x="609600" y="2670274"/>
-            <a:ext cx="2590800" cy="1488877"/>
+            <a:off x="609600" y="2684562"/>
+            <a:ext cx="2590800" cy="1460302"/>
           </a:xfrm>
           <a:prstGeom prst="roundRect">
             <a:avLst>
-              <a:gd name="adj" fmla="val 7677"/>
+              <a:gd name="adj" fmla="val 7827"/>
             </a:avLst>
           </a:prstGeom>
           <a:solidFill>
@@ -4382,8 +4382,8 @@
         </p:nvSpPr>
         <p:spPr>
           <a:xfrm>
-            <a:off x="722897" y="3009900"/>
-            <a:ext cx="2364206" cy="809625"/>
+            <a:off x="722897" y="3024188"/>
+            <a:ext cx="2364206" cy="781050"/>
           </a:xfrm>
           <a:prstGeom prst="rect">
             <a:avLst/>
@@ -4421,12 +4421,12 @@
         </p:nvSpPr>
         <p:spPr>
           <a:xfrm>
-            <a:off x="3403550" y="2670274"/>
-            <a:ext cx="2590800" cy="1488877"/>
+            <a:off x="3403550" y="2684562"/>
+            <a:ext cx="2590800" cy="1460302"/>
           </a:xfrm>
           <a:prstGeom prst="roundRect">
             <a:avLst>
-              <a:gd name="adj" fmla="val 7677"/>
+              <a:gd name="adj" fmla="val 7827"/>
             </a:avLst>
           </a:prstGeom>
           <a:solidFill>
@@ -4457,8 +4457,8 @@
         </p:nvSpPr>
         <p:spPr>
           <a:xfrm>
-            <a:off x="3516847" y="3009900"/>
-            <a:ext cx="2364206" cy="809625"/>
+            <a:off x="3516847" y="3024188"/>
+            <a:ext cx="2364206" cy="781050"/>
           </a:xfrm>
           <a:prstGeom prst="rect">
             <a:avLst/>
@@ -4496,12 +4496,12 @@
         </p:nvSpPr>
         <p:spPr>
           <a:xfrm>
-            <a:off x="6197501" y="2670274"/>
-            <a:ext cx="2590800" cy="1488877"/>
+            <a:off x="6197501" y="2684562"/>
+            <a:ext cx="2590800" cy="1460302"/>
           </a:xfrm>
           <a:prstGeom prst="roundRect">
             <a:avLst>
-              <a:gd name="adj" fmla="val 7677"/>
+              <a:gd name="adj" fmla="val 7827"/>
             </a:avLst>
           </a:prstGeom>
           <a:solidFill>
@@ -4532,8 +4532,8 @@
         </p:nvSpPr>
         <p:spPr>
           <a:xfrm>
-            <a:off x="6310798" y="3009900"/>
-            <a:ext cx="2364206" cy="809625"/>
+            <a:off x="6310798" y="3024188"/>
+            <a:ext cx="2364206" cy="781050"/>
           </a:xfrm>
           <a:prstGeom prst="rect">
             <a:avLst/>
@@ -4571,12 +4571,12 @@
         </p:nvSpPr>
         <p:spPr>
           <a:xfrm>
-            <a:off x="8991451" y="2670274"/>
-            <a:ext cx="2590949" cy="1488877"/>
+            <a:off x="8991451" y="2684562"/>
+            <a:ext cx="2590949" cy="1460302"/>
           </a:xfrm>
           <a:prstGeom prst="roundRect">
             <a:avLst>
-              <a:gd name="adj" fmla="val 7677"/>
+              <a:gd name="adj" fmla="val 7827"/>
             </a:avLst>
           </a:prstGeom>
           <a:solidFill>
@@ -4607,8 +4607,8 @@
         </p:nvSpPr>
         <p:spPr>
           <a:xfrm>
-            <a:off x="9104747" y="3009900"/>
-            <a:ext cx="2364358" cy="809625"/>
+            <a:off x="9104747" y="3024188"/>
+            <a:ext cx="2364358" cy="781050"/>
           </a:xfrm>
           <a:prstGeom prst="rect">
             <a:avLst/>
@@ -4646,7 +4646,7 @@
         </p:nvSpPr>
         <p:spPr>
           <a:xfrm>
-            <a:off x="609600" y="4311551"/>
+            <a:off x="609600" y="4297263"/>
             <a:ext cx="11192256" cy="228600"/>
           </a:xfrm>
           <a:prstGeom prst="rect">
@@ -5728,8 +5728,8 @@
         </p:nvSpPr>
         <p:spPr>
           <a:xfrm>
-            <a:off x="507950" y="176213"/>
-            <a:ext cx="1371404" cy="180975"/>
+            <a:off x="507950" y="180975"/>
+            <a:ext cx="1264837" cy="171450"/>
           </a:xfrm>
           <a:prstGeom prst="rect">
             <a:avLst/>
@@ -5767,8 +5767,8 @@
         </p:nvSpPr>
         <p:spPr>
           <a:xfrm>
-            <a:off x="2137916" y="166688"/>
-            <a:ext cx="1191667" cy="200025"/>
+            <a:off x="2033439" y="166688"/>
+            <a:ext cx="1109844" cy="200025"/>
           </a:xfrm>
           <a:prstGeom prst="rect">
             <a:avLst/>
@@ -5806,8 +5806,8 @@
         </p:nvSpPr>
         <p:spPr>
           <a:xfrm>
-            <a:off x="11214646" y="176213"/>
-            <a:ext cx="478792" cy="180975"/>
+            <a:off x="11244709" y="180975"/>
+            <a:ext cx="448127" cy="171450"/>
           </a:xfrm>
           <a:prstGeom prst="rect">
             <a:avLst/>
@@ -5875,7 +5875,7 @@
         </p:nvSpPr>
         <p:spPr>
           <a:xfrm>
-            <a:off x="609600" y="2203549"/>
+            <a:off x="609600" y="2408337"/>
             <a:ext cx="11192256" cy="200025"/>
           </a:xfrm>
           <a:prstGeom prst="rect">
@@ -5914,12 +5914,12 @@
         </p:nvSpPr>
         <p:spPr>
           <a:xfrm>
-            <a:off x="609600" y="2530525"/>
-            <a:ext cx="2805261" cy="1085850"/>
+            <a:off x="609600" y="2735312"/>
+            <a:ext cx="2844701" cy="666750"/>
           </a:xfrm>
           <a:prstGeom prst="roundRect">
             <a:avLst>
-              <a:gd name="adj" fmla="val 5848"/>
+              <a:gd name="adj" fmla="val 9524"/>
             </a:avLst>
           </a:prstGeom>
           <a:solidFill>
@@ -5948,8 +5948,8 @@
         </p:nvSpPr>
         <p:spPr>
           <a:xfrm>
-            <a:off x="812750" y="2644825"/>
-            <a:ext cx="2446940" cy="857250"/>
+            <a:off x="812750" y="2849612"/>
+            <a:ext cx="2487168" cy="438150"/>
           </a:xfrm>
           <a:prstGeom prst="rect">
             <a:avLst/>
@@ -5987,12 +5987,12 @@
         </p:nvSpPr>
         <p:spPr>
           <a:xfrm>
-            <a:off x="3910013" y="2530525"/>
-            <a:ext cx="2805113" cy="1085850"/>
+            <a:off x="3943350" y="2735312"/>
+            <a:ext cx="2844701" cy="666750"/>
           </a:xfrm>
           <a:prstGeom prst="roundRect">
             <a:avLst>
-              <a:gd name="adj" fmla="val 5848"/>
+              <a:gd name="adj" fmla="val 9524"/>
             </a:avLst>
           </a:prstGeom>
           <a:solidFill>
@@ -6021,8 +6021,8 @@
         </p:nvSpPr>
         <p:spPr>
           <a:xfrm>
-            <a:off x="4113163" y="2644825"/>
-            <a:ext cx="2446788" cy="857250"/>
+            <a:off x="4146500" y="2849612"/>
+            <a:ext cx="2487168" cy="438150"/>
           </a:xfrm>
           <a:prstGeom prst="rect">
             <a:avLst/>
@@ -6082,8 +6082,8 @@
         </p:nvSpPr>
         <p:spPr>
           <a:xfrm>
-            <a:off x="6994475" y="2844850"/>
-            <a:ext cx="4679683" cy="457200"/>
+            <a:off x="7067401" y="2954387"/>
+            <a:ext cx="4585716" cy="228600"/>
           </a:xfrm>
           <a:prstGeom prst="rect">
             <a:avLst/>
@@ -6124,12 +6124,12 @@
         </p:nvSpPr>
         <p:spPr>
           <a:xfrm>
-            <a:off x="609600" y="3895576"/>
-            <a:ext cx="4063901" cy="657225"/>
+            <a:off x="609600" y="3681264"/>
+            <a:ext cx="4063901" cy="666750"/>
           </a:xfrm>
           <a:prstGeom prst="roundRect">
             <a:avLst>
-              <a:gd name="adj" fmla="val 9662"/>
+              <a:gd name="adj" fmla="val 9524"/>
             </a:avLst>
           </a:prstGeom>
           <a:solidFill>
@@ -6158,8 +6158,8 @@
         </p:nvSpPr>
         <p:spPr>
           <a:xfrm>
-            <a:off x="812750" y="4009876"/>
-            <a:ext cx="3730752" cy="428625"/>
+            <a:off x="812750" y="3795564"/>
+            <a:ext cx="3730752" cy="438150"/>
           </a:xfrm>
           <a:prstGeom prst="rect">
             <a:avLst/>
@@ -6197,12 +6197,12 @@
         </p:nvSpPr>
         <p:spPr>
           <a:xfrm>
-            <a:off x="5168652" y="3895576"/>
-            <a:ext cx="3149501" cy="657225"/>
+            <a:off x="5162550" y="3681264"/>
+            <a:ext cx="3149501" cy="666750"/>
           </a:xfrm>
           <a:prstGeom prst="roundRect">
             <a:avLst>
-              <a:gd name="adj" fmla="val 9662"/>
+              <a:gd name="adj" fmla="val 9524"/>
             </a:avLst>
           </a:prstGeom>
           <a:solidFill>
@@ -6231,8 +6231,8 @@
         </p:nvSpPr>
         <p:spPr>
           <a:xfrm>
-            <a:off x="5371802" y="4009876"/>
-            <a:ext cx="2798064" cy="428625"/>
+            <a:off x="5365700" y="3795564"/>
+            <a:ext cx="2798064" cy="438150"/>
           </a:xfrm>
           <a:prstGeom prst="rect">
             <a:avLst/>
@@ -6292,8 +6292,8 @@
         </p:nvSpPr>
         <p:spPr>
           <a:xfrm>
-            <a:off x="8597503" y="4109889"/>
-            <a:ext cx="1585600" cy="228600"/>
+            <a:off x="8591401" y="3900339"/>
+            <a:ext cx="1554480" cy="228600"/>
           </a:xfrm>
           <a:prstGeom prst="rect">
             <a:avLst/>
@@ -9936,7 +9936,7 @@
       </p:sp>
       <p:pic>
         <p:nvPicPr>
-          <p:cNvPr id="10" name="Image 0" descr="/var/folders/6c/210dcgxn4gz5sm71vld2cy1h0000gn/T/tmp.LHO6BoqOp1/img/shijian.png">    </p:cNvPr>
+          <p:cNvPr id="10" name="Image 0" descr="/var/folders/6c/210dcgxn4gz5sm71vld2cy1h0000gn/T/tmp.kuKuqUEQz8/img/shijian.png">    </p:cNvPr>
           <p:cNvPicPr>
             <a:picLocks noChangeAspect="1"/>
           </p:cNvPicPr>
@@ -10035,7 +10035,7 @@
       </p:sp>
       <p:pic>
         <p:nvPicPr>
-          <p:cNvPr id="13" name="Image 1" descr="/var/folders/6c/210dcgxn4gz5sm71vld2cy1h0000gn/T/tmp.LHO6BoqOp1/img/dayue.png">    </p:cNvPr>
+          <p:cNvPr id="13" name="Image 1" descr="/var/folders/6c/210dcgxn4gz5sm71vld2cy1h0000gn/T/tmp.kuKuqUEQz8/img/dayue.png">    </p:cNvPr>
           <p:cNvPicPr>
             <a:picLocks noChangeAspect="1"/>
           </p:cNvPicPr>
@@ -10134,7 +10134,7 @@
       </p:sp>
       <p:pic>
         <p:nvPicPr>
-          <p:cNvPr id="16" name="Image 2" descr="/var/folders/6c/210dcgxn4gz5sm71vld2cy1h0000gn/T/tmp.LHO6BoqOp1/img/feiji.png">    </p:cNvPr>
+          <p:cNvPr id="16" name="Image 2" descr="/var/folders/6c/210dcgxn4gz5sm71vld2cy1h0000gn/T/tmp.kuKuqUEQz8/img/feiji.png">    </p:cNvPr>
           <p:cNvPicPr>
             <a:picLocks noChangeAspect="1"/>
           </p:cNvPicPr>
@@ -10233,7 +10233,7 @@
       </p:sp>
       <p:pic>
         <p:nvPicPr>
-          <p:cNvPr id="19" name="Image 3" descr="/var/folders/6c/210dcgxn4gz5sm71vld2cy1h0000gn/T/tmp.LHO6BoqOp1/img/jichang.png">    </p:cNvPr>
+          <p:cNvPr id="19" name="Image 3" descr="/var/folders/6c/210dcgxn4gz5sm71vld2cy1h0000gn/T/tmp.kuKuqUEQz8/img/jichang.png">    </p:cNvPr>
           <p:cNvPicPr>
             <a:picLocks noChangeAspect="1"/>
           </p:cNvPicPr>
@@ -10432,8 +10432,8 @@
         </p:nvSpPr>
         <p:spPr>
           <a:xfrm>
-            <a:off x="507950" y="180975"/>
-            <a:ext cx="2386370" cy="171450"/>
+            <a:off x="507950" y="176213"/>
+            <a:ext cx="2644893" cy="180975"/>
           </a:xfrm>
           <a:prstGeom prst="rect">
             <a:avLst/>
@@ -10471,8 +10471,8 @@
         </p:nvSpPr>
         <p:spPr>
           <a:xfrm>
-            <a:off x="3132981" y="166688"/>
-            <a:ext cx="943466" cy="200025"/>
+            <a:off x="3386435" y="166688"/>
+            <a:ext cx="1032727" cy="200025"/>
           </a:xfrm>
           <a:prstGeom prst="rect">
             <a:avLst/>
@@ -10510,8 +10510,8 @@
         </p:nvSpPr>
         <p:spPr>
           <a:xfrm>
-            <a:off x="11244709" y="180975"/>
-            <a:ext cx="448127" cy="171450"/>
+            <a:off x="11213455" y="176213"/>
+            <a:ext cx="480006" cy="180975"/>
           </a:xfrm>
           <a:prstGeom prst="rect">
             <a:avLst/>
@@ -10612,7 +10612,7 @@
       </p:sp>
       <p:pic>
         <p:nvPicPr>
-          <p:cNvPr id="9" name="Image 0" descr="/var/folders/6c/210dcgxn4gz5sm71vld2cy1h0000gn/T/tmp.LHO6BoqOp1/img/tubiao.png">    </p:cNvPr>
+          <p:cNvPr id="9" name="Image 0" descr="/var/folders/6c/210dcgxn4gz5sm71vld2cy1h0000gn/T/tmp.kuKuqUEQz8/img/tubiao.png">    </p:cNvPr>
           <p:cNvPicPr>
             <a:picLocks noChangeAspect="1"/>
           </p:cNvPicPr>
@@ -14443,8 +14443,8 @@
         </p:nvSpPr>
         <p:spPr>
           <a:xfrm>
-            <a:off x="507950" y="180975"/>
-            <a:ext cx="2386370" cy="171450"/>
+            <a:off x="507950" y="176213"/>
+            <a:ext cx="2644893" cy="180975"/>
           </a:xfrm>
           <a:prstGeom prst="rect">
             <a:avLst/>
@@ -14482,8 +14482,8 @@
         </p:nvSpPr>
         <p:spPr>
           <a:xfrm>
-            <a:off x="3132981" y="166688"/>
-            <a:ext cx="1625980" cy="200025"/>
+            <a:off x="3386435" y="166688"/>
+            <a:ext cx="1788411" cy="200025"/>
           </a:xfrm>
           <a:prstGeom prst="rect">
             <a:avLst/>
@@ -14521,8 +14521,8 @@
         </p:nvSpPr>
         <p:spPr>
           <a:xfrm>
-            <a:off x="11244709" y="180975"/>
-            <a:ext cx="448127" cy="171450"/>
+            <a:off x="11188898" y="176213"/>
+            <a:ext cx="505054" cy="180975"/>
           </a:xfrm>
           <a:prstGeom prst="rect">
             <a:avLst/>
@@ -14590,7 +14590,7 @@
         </p:nvSpPr>
         <p:spPr>
           <a:xfrm>
-            <a:off x="609600" y="1696045"/>
+            <a:off x="609600" y="1691283"/>
             <a:ext cx="11192256" cy="200025"/>
           </a:xfrm>
           <a:prstGeom prst="rect">
@@ -14629,7 +14629,7 @@
         </p:nvSpPr>
         <p:spPr>
           <a:xfrm>
-            <a:off x="609600" y="1896070"/>
+            <a:off x="609600" y="1891308"/>
             <a:ext cx="10972800" cy="1877020"/>
           </a:xfrm>
           <a:prstGeom prst="roundRect">
@@ -14665,7 +14665,7 @@
         </p:nvSpPr>
         <p:spPr>
           <a:xfrm>
-            <a:off x="933450" y="2143720"/>
+            <a:off x="933450" y="2138958"/>
             <a:ext cx="10531602" cy="345430"/>
           </a:xfrm>
           <a:prstGeom prst="rect">
@@ -14707,7 +14707,7 @@
         </p:nvSpPr>
         <p:spPr>
           <a:xfrm>
-            <a:off x="933450" y="2489150"/>
+            <a:off x="933450" y="2484388"/>
             <a:ext cx="10531602" cy="345430"/>
           </a:xfrm>
           <a:prstGeom prst="rect">
@@ -14771,7 +14771,7 @@
         </p:nvSpPr>
         <p:spPr>
           <a:xfrm>
-            <a:off x="933450" y="2834580"/>
+            <a:off x="933450" y="2829818"/>
             <a:ext cx="10531602" cy="345430"/>
           </a:xfrm>
           <a:prstGeom prst="rect">
@@ -14813,7 +14813,7 @@
         </p:nvSpPr>
         <p:spPr>
           <a:xfrm>
-            <a:off x="933450" y="3180011"/>
+            <a:off x="933450" y="3175248"/>
             <a:ext cx="10531602" cy="345430"/>
           </a:xfrm>
           <a:prstGeom prst="rect">
@@ -14855,12 +14855,12 @@
         </p:nvSpPr>
         <p:spPr>
           <a:xfrm>
-            <a:off x="609600" y="3950791"/>
-            <a:ext cx="10972800" cy="1236464"/>
+            <a:off x="609600" y="3946029"/>
+            <a:ext cx="10972800" cy="1245989"/>
           </a:xfrm>
           <a:prstGeom prst="roundRect">
             <a:avLst>
-              <a:gd name="adj" fmla="val 5136"/>
+              <a:gd name="adj" fmla="val 5096"/>
             </a:avLst>
           </a:prstGeom>
           <a:solidFill>
@@ -14893,8 +14893,8 @@
         </p:nvSpPr>
         <p:spPr>
           <a:xfrm>
-            <a:off x="857250" y="4147542"/>
-            <a:ext cx="10687050" cy="190500"/>
+            <a:off x="857250" y="4142780"/>
+            <a:ext cx="10687050" cy="200025"/>
           </a:xfrm>
           <a:prstGeom prst="rect">
             <a:avLst/>
@@ -14935,7 +14935,7 @@
         </p:nvSpPr>
         <p:spPr>
           <a:xfrm>
-            <a:off x="857250" y="4401443"/>
+            <a:off x="857250" y="4406205"/>
             <a:ext cx="10687050" cy="589062"/>
           </a:xfrm>
           <a:prstGeom prst="rect">
@@ -16705,8 +16705,8 @@
         </p:nvSpPr>
         <p:spPr>
           <a:xfrm>
-            <a:off x="507950" y="176213"/>
-            <a:ext cx="1785830" cy="180975"/>
+            <a:off x="507950" y="180975"/>
+            <a:ext cx="1608826" cy="171450"/>
           </a:xfrm>
           <a:prstGeom prst="rect">
             <a:avLst/>
@@ -16744,8 +16744,8 @@
         </p:nvSpPr>
         <p:spPr>
           <a:xfrm>
-            <a:off x="2544217" y="166688"/>
-            <a:ext cx="1279562" cy="200025"/>
+            <a:off x="2370683" y="166688"/>
+            <a:ext cx="1116675" cy="200025"/>
           </a:xfrm>
           <a:prstGeom prst="rect">
             <a:avLst/>
@@ -16783,8 +16783,8 @@
         </p:nvSpPr>
         <p:spPr>
           <a:xfrm>
-            <a:off x="11188452" y="176213"/>
-            <a:ext cx="505510" cy="180975"/>
+            <a:off x="11244709" y="180975"/>
+            <a:ext cx="448127" cy="171450"/>
           </a:xfrm>
           <a:prstGeom prst="rect">
             <a:avLst/>
@@ -16852,7 +16852,7 @@
         </p:nvSpPr>
         <p:spPr>
           <a:xfrm>
-            <a:off x="609600" y="1613446"/>
+            <a:off x="609600" y="1599158"/>
             <a:ext cx="11192256" cy="200025"/>
           </a:xfrm>
           <a:prstGeom prst="rect">
@@ -16891,12 +16891,12 @@
         </p:nvSpPr>
         <p:spPr>
           <a:xfrm>
-            <a:off x="609600" y="1813471"/>
-            <a:ext cx="10972800" cy="925711"/>
+            <a:off x="609600" y="1799183"/>
+            <a:ext cx="10972800" cy="935236"/>
           </a:xfrm>
           <a:prstGeom prst="roundRect">
             <a:avLst>
-              <a:gd name="adj" fmla="val 6860"/>
+              <a:gd name="adj" fmla="val 6790"/>
             </a:avLst>
           </a:prstGeom>
           <a:solidFill>
@@ -16927,7 +16927,7 @@
         </p:nvSpPr>
         <p:spPr>
           <a:xfrm>
-            <a:off x="822275" y="1975396"/>
+            <a:off x="822275" y="1961108"/>
             <a:ext cx="297841" cy="350490"/>
           </a:xfrm>
           <a:prstGeom prst="rect">
@@ -16969,7 +16969,7 @@
         </p:nvSpPr>
         <p:spPr>
           <a:xfrm>
-            <a:off x="1279327" y="1975396"/>
+            <a:off x="1279327" y="1961108"/>
             <a:ext cx="3691890" cy="284411"/>
           </a:xfrm>
           <a:prstGeom prst="rect">
@@ -17011,8 +17011,8 @@
         </p:nvSpPr>
         <p:spPr>
           <a:xfrm>
-            <a:off x="1279327" y="2310557"/>
-            <a:ext cx="3691890" cy="266700"/>
+            <a:off x="1279327" y="2296269"/>
+            <a:ext cx="3691890" cy="276225"/>
           </a:xfrm>
           <a:prstGeom prst="rect">
             <a:avLst/>
@@ -17053,12 +17053,12 @@
         </p:nvSpPr>
         <p:spPr>
           <a:xfrm>
-            <a:off x="609600" y="2891582"/>
-            <a:ext cx="10972800" cy="935236"/>
+            <a:off x="609600" y="2886819"/>
+            <a:ext cx="10972800" cy="944761"/>
           </a:xfrm>
           <a:prstGeom prst="roundRect">
             <a:avLst>
-              <a:gd name="adj" fmla="val 6790"/>
+              <a:gd name="adj" fmla="val 6721"/>
             </a:avLst>
           </a:prstGeom>
           <a:solidFill>
@@ -17089,7 +17089,7 @@
         </p:nvSpPr>
         <p:spPr>
           <a:xfrm>
-            <a:off x="822275" y="3053507"/>
+            <a:off x="822275" y="3048744"/>
             <a:ext cx="297841" cy="350490"/>
           </a:xfrm>
           <a:prstGeom prst="rect">
@@ -17131,8 +17131,8 @@
         </p:nvSpPr>
         <p:spPr>
           <a:xfrm>
-            <a:off x="1279327" y="3053507"/>
-            <a:ext cx="1262104" cy="284411"/>
+            <a:off x="1279327" y="3048744"/>
+            <a:ext cx="1243432" cy="284411"/>
           </a:xfrm>
           <a:prstGeom prst="rect">
             <a:avLst/>
@@ -17173,8 +17173,8 @@
         </p:nvSpPr>
         <p:spPr>
           <a:xfrm>
-            <a:off x="1279327" y="3388668"/>
-            <a:ext cx="1262104" cy="276225"/>
+            <a:off x="1279327" y="3383905"/>
+            <a:ext cx="1243432" cy="285750"/>
           </a:xfrm>
           <a:prstGeom prst="rect">
             <a:avLst/>
@@ -17215,12 +17215,12 @@
         </p:nvSpPr>
         <p:spPr>
           <a:xfrm>
-            <a:off x="609600" y="3979218"/>
-            <a:ext cx="10972800" cy="935236"/>
+            <a:off x="609600" y="3983980"/>
+            <a:ext cx="10972800" cy="944761"/>
           </a:xfrm>
           <a:prstGeom prst="roundRect">
             <a:avLst>
-              <a:gd name="adj" fmla="val 6790"/>
+              <a:gd name="adj" fmla="val 6721"/>
             </a:avLst>
           </a:prstGeom>
           <a:solidFill>
@@ -17251,7 +17251,7 @@
         </p:nvSpPr>
         <p:spPr>
           <a:xfrm>
-            <a:off x="822275" y="4141143"/>
+            <a:off x="822275" y="4145905"/>
             <a:ext cx="297841" cy="350490"/>
           </a:xfrm>
           <a:prstGeom prst="rect">
@@ -17293,8 +17293,8 @@
         </p:nvSpPr>
         <p:spPr>
           <a:xfrm>
-            <a:off x="1279327" y="4141143"/>
-            <a:ext cx="2313807" cy="284411"/>
+            <a:off x="1279327" y="4145905"/>
+            <a:ext cx="2279651" cy="284411"/>
           </a:xfrm>
           <a:prstGeom prst="rect">
             <a:avLst/>
@@ -17335,8 +17335,8 @@
         </p:nvSpPr>
         <p:spPr>
           <a:xfrm>
-            <a:off x="1279327" y="4476304"/>
-            <a:ext cx="2313807" cy="276225"/>
+            <a:off x="1279327" y="4481066"/>
+            <a:ext cx="2279651" cy="285750"/>
           </a:xfrm>
           <a:prstGeom prst="rect">
             <a:avLst/>
@@ -17377,7 +17377,7 @@
         </p:nvSpPr>
         <p:spPr>
           <a:xfrm>
-            <a:off x="609600" y="5041404"/>
+            <a:off x="609600" y="5055691"/>
             <a:ext cx="11192256" cy="228600"/>
           </a:xfrm>
           <a:prstGeom prst="rect">
@@ -19622,7 +19622,7 @@
       </p:sp>
       <p:pic>
         <p:nvPicPr>
-          <p:cNvPr id="10" name="Image 0" descr="/var/folders/6c/210dcgxn4gz5sm71vld2cy1h0000gn/T/tmp.LHO6BoqOp1/img/shijian.png">    </p:cNvPr>
+          <p:cNvPr id="10" name="Image 0" descr="/var/folders/6c/210dcgxn4gz5sm71vld2cy1h0000gn/T/tmp.kuKuqUEQz8/img/shijian.png">    </p:cNvPr>
           <p:cNvPicPr>
             <a:picLocks noChangeAspect="1"/>
           </p:cNvPicPr>
@@ -19802,7 +19802,7 @@
       </p:sp>
       <p:pic>
         <p:nvPicPr>
-          <p:cNvPr id="15" name="Image 1" descr="/var/folders/6c/210dcgxn4gz5sm71vld2cy1h0000gn/T/tmp.LHO6BoqOp1/img/dayue.png">    </p:cNvPr>
+          <p:cNvPr id="15" name="Image 1" descr="/var/folders/6c/210dcgxn4gz5sm71vld2cy1h0000gn/T/tmp.kuKuqUEQz8/img/dayue.png">    </p:cNvPr>
           <p:cNvPicPr>
             <a:picLocks noChangeAspect="1"/>
           </p:cNvPicPr>
@@ -21541,7 +21541,7 @@
       </p:sp>
       <p:pic>
         <p:nvPicPr>
-          <p:cNvPr id="10" name="Image 0" descr="/var/folders/6c/210dcgxn4gz5sm71vld2cy1h0000gn/T/tmp.LHO6BoqOp1/img/feiji.png">    </p:cNvPr>
+          <p:cNvPr id="10" name="Image 0" descr="/var/folders/6c/210dcgxn4gz5sm71vld2cy1h0000gn/T/tmp.kuKuqUEQz8/img/feiji.png">    </p:cNvPr>
           <p:cNvPicPr>
             <a:picLocks noChangeAspect="1"/>
           </p:cNvPicPr>
@@ -21721,7 +21721,7 @@
       </p:sp>
       <p:pic>
         <p:nvPicPr>
-          <p:cNvPr id="15" name="Image 1" descr="/var/folders/6c/210dcgxn4gz5sm71vld2cy1h0000gn/T/tmp.LHO6BoqOp1/img/jichang.png">    </p:cNvPr>
+          <p:cNvPr id="15" name="Image 1" descr="/var/folders/6c/210dcgxn4gz5sm71vld2cy1h0000gn/T/tmp.kuKuqUEQz8/img/jichang.png">    </p:cNvPr>
           <p:cNvPicPr>
             <a:picLocks noChangeAspect="1"/>
           </p:cNvPicPr>
